--- a/builder/assets/reference-pages/hr-ticket-intake.pptx
+++ b/builder/assets/reference-pages/hr-ticket-intake.pptx
@@ -1097,7 +1097,7 @@
                   <a:srgbClr val="15375F"/>
                 </a:solidFill>
               </a:rPr>
-              <a:t>一次命中率 78.4%、转人工率 14.8%，证明与异动入口仍让员工二次找路</a:t>
+              <a:t>one hit rate 78.4%, transfer labor rate 14.8%, the proof and change entrance still allow employees to find their way again.</a:t>
             </a:r>
           </a:p>
         </p:txBody>
@@ -1151,7 +1151,7 @@
                   <a:srgbClr val="E8872D"/>
                 </a:solidFill>
               </a:rPr>
-              <a:t>一次命中率</a:t>
+              <a:t>one hit rate</a:t>
             </a:r>
           </a:p>
           <a:p xmlns:a="http://schemas.openxmlformats.org/drawingml/2006/main">
@@ -1185,7 +1185,7 @@
                   <a:srgbClr val="E8872D"/>
                 </a:solidFill>
               </a:rPr>
-              <a:t>目标 85%</a:t>
+              <a:t>target 85%</a:t>
             </a:r>
           </a:p>
         </p:txBody>
@@ -1239,7 +1239,7 @@
                   <a:srgbClr val="15375F"/>
                 </a:solidFill>
               </a:rPr>
-              <a:t>转人工率</a:t>
+              <a:t>Transfer labor rate</a:t>
             </a:r>
           </a:p>
           <a:p xmlns:a="http://schemas.openxmlformats.org/drawingml/2006/main">
@@ -1273,7 +1273,7 @@
                   <a:srgbClr val="15375F"/>
                 </a:solidFill>
               </a:rPr>
-              <a:t>目标 &lt;10%</a:t>
+              <a:t>target &lt;10%</a:t>
             </a:r>
           </a:p>
         </p:txBody>
@@ -1327,7 +1327,7 @@
                   <a:srgbClr val="15375F"/>
                 </a:solidFill>
               </a:rPr>
-              <a:t>目录完整率</a:t>
+              <a:t>directory completeness</a:t>
             </a:r>
           </a:p>
           <a:p xmlns:a="http://schemas.openxmlformats.org/drawingml/2006/main">
@@ -1361,7 +1361,7 @@
                   <a:srgbClr val="15375F"/>
                 </a:solidFill>
               </a:rPr>
-              <a:t>目标 90%</a:t>
+              <a:t>target 90%</a:t>
             </a:r>
           </a:p>
         </p:txBody>
@@ -1450,7 +1450,7 @@
                   <a:srgbClr val="15375F"/>
                 </a:solidFill>
               </a:rPr>
-              <a:t>一次命中</a:t>
+              <a:t>one hit</a:t>
             </a:r>
           </a:p>
         </p:txBody>
@@ -1504,7 +1504,7 @@
                   <a:srgbClr val="15375F"/>
                 </a:solidFill>
               </a:rPr>
-              <a:t>二次澄清</a:t>
+              <a:t>Second clarification</a:t>
             </a:r>
           </a:p>
         </p:txBody>
@@ -1558,7 +1558,7 @@
                   <a:srgbClr val="15375F"/>
                 </a:solidFill>
               </a:rPr>
-              <a:t>转人工</a:t>
+              <a:t>Switch to manual</a:t>
             </a:r>
           </a:p>
         </p:txBody>
@@ -1612,7 +1612,7 @@
                   <a:srgbClr val="15375F"/>
                 </a:solidFill>
               </a:rPr>
-              <a:t>其他</a:t>
+              <a:t>Others</a:t>
             </a:r>
           </a:p>
         </p:txBody>
@@ -1662,7 +1662,7 @@
                   <a:srgbClr val="15375F"/>
                 </a:solidFill>
               </a:rPr>
-              <a:t>薪资</a:t>
+              <a:t>salary</a:t>
             </a:r>
           </a:p>
         </p:txBody>
@@ -1733,7 +1733,7 @@
                   <a:srgbClr val="172033"/>
                 </a:solidFill>
               </a:rPr>
-              <a:t>命中 89%</a:t>
+              <a:t>hit 89%</a:t>
             </a:r>
           </a:p>
         </p:txBody>
@@ -1804,7 +1804,7 @@
                   <a:srgbClr val="172033"/>
                 </a:solidFill>
               </a:rPr>
-              <a:t>命中 62%</a:t>
+              <a:t>hit 62%</a:t>
             </a:r>
           </a:p>
         </p:txBody>
@@ -1875,7 +1875,7 @@
                   <a:srgbClr val="172033"/>
                 </a:solidFill>
               </a:rPr>
-              <a:t>命中 54%</a:t>
+              <a:t>hit 54%</a:t>
             </a:r>
           </a:p>
         </p:txBody>
@@ -1946,7 +1946,7 @@
                   <a:srgbClr val="172033"/>
                 </a:solidFill>
               </a:rPr>
-              <a:t>命中 46%</a:t>
+              <a:t>hit 46%</a:t>
             </a:r>
           </a:p>
         </p:txBody>
@@ -1996,7 +1996,7 @@
                   <a:srgbClr val="15375F"/>
                 </a:solidFill>
               </a:rPr>
-              <a:t>福利</a:t>
+              <a:t>welfare</a:t>
             </a:r>
           </a:p>
         </p:txBody>
@@ -2067,7 +2067,7 @@
                   <a:srgbClr val="172033"/>
                 </a:solidFill>
               </a:rPr>
-              <a:t>命中 89%</a:t>
+              <a:t>hit 89%</a:t>
             </a:r>
           </a:p>
         </p:txBody>
@@ -2138,7 +2138,7 @@
                   <a:srgbClr val="172033"/>
                 </a:solidFill>
               </a:rPr>
-              <a:t>命中 62%</a:t>
+              <a:t>hit 62%</a:t>
             </a:r>
           </a:p>
         </p:txBody>
@@ -2209,7 +2209,7 @@
                   <a:srgbClr val="172033"/>
                 </a:solidFill>
               </a:rPr>
-              <a:t>命中 54%</a:t>
+              <a:t>hit 54%</a:t>
             </a:r>
           </a:p>
         </p:txBody>
@@ -2280,7 +2280,7 @@
                   <a:srgbClr val="172033"/>
                 </a:solidFill>
               </a:rPr>
-              <a:t>命中 46%</a:t>
+              <a:t>hit 46%</a:t>
             </a:r>
           </a:p>
         </p:txBody>
@@ -2330,7 +2330,7 @@
                   <a:srgbClr val="15375F"/>
                 </a:solidFill>
               </a:rPr>
-              <a:t>休假</a:t>
+              <a:t>vacation</a:t>
             </a:r>
           </a:p>
         </p:txBody>
@@ -2401,7 +2401,7 @@
                   <a:srgbClr val="172033"/>
                 </a:solidFill>
               </a:rPr>
-              <a:t>命中 90%</a:t>
+              <a:t>hit 90%</a:t>
             </a:r>
           </a:p>
         </p:txBody>
@@ -2472,7 +2472,7 @@
                   <a:srgbClr val="172033"/>
                 </a:solidFill>
               </a:rPr>
-              <a:t>命中 62%</a:t>
+              <a:t>hit 62%</a:t>
             </a:r>
           </a:p>
         </p:txBody>
@@ -2543,7 +2543,7 @@
                   <a:srgbClr val="172033"/>
                 </a:solidFill>
               </a:rPr>
-              <a:t>命中 54%</a:t>
+              <a:t>hit 54%</a:t>
             </a:r>
           </a:p>
         </p:txBody>
@@ -2614,7 +2614,7 @@
                   <a:srgbClr val="172033"/>
                 </a:solidFill>
               </a:rPr>
-              <a:t>命中 46%</a:t>
+              <a:t>hit 46%</a:t>
             </a:r>
           </a:p>
         </p:txBody>
@@ -2664,7 +2664,7 @@
                   <a:srgbClr val="15375F"/>
                 </a:solidFill>
               </a:rPr>
-              <a:t>证明</a:t>
+              <a:t>prove</a:t>
             </a:r>
           </a:p>
         </p:txBody>
@@ -2735,7 +2735,7 @@
                   <a:srgbClr val="172033"/>
                 </a:solidFill>
               </a:rPr>
-              <a:t>命中 88%</a:t>
+              <a:t>hit 88%</a:t>
             </a:r>
           </a:p>
         </p:txBody>
@@ -2806,7 +2806,7 @@
                   <a:srgbClr val="172033"/>
                 </a:solidFill>
               </a:rPr>
-              <a:t>命中 62%</a:t>
+              <a:t>hit 62%</a:t>
             </a:r>
           </a:p>
         </p:txBody>
@@ -2877,7 +2877,7 @@
                   <a:srgbClr val="172033"/>
                 </a:solidFill>
               </a:rPr>
-              <a:t>命中 54%</a:t>
+              <a:t>hit 54%</a:t>
             </a:r>
           </a:p>
         </p:txBody>
@@ -2948,7 +2948,7 @@
                   <a:srgbClr val="172033"/>
                 </a:solidFill>
               </a:rPr>
-              <a:t>命中 46%</a:t>
+              <a:t>hit 46%</a:t>
             </a:r>
           </a:p>
         </p:txBody>
@@ -2998,7 +2998,7 @@
                   <a:srgbClr val="15375F"/>
                 </a:solidFill>
               </a:rPr>
-              <a:t>其他</a:t>
+              <a:t>Others</a:t>
             </a:r>
           </a:p>
         </p:txBody>
@@ -3069,7 +3069,7 @@
                   <a:srgbClr val="172033"/>
                 </a:solidFill>
               </a:rPr>
-              <a:t>命中 87%</a:t>
+              <a:t>hit 87%</a:t>
             </a:r>
           </a:p>
         </p:txBody>
@@ -3140,7 +3140,7 @@
                   <a:srgbClr val="172033"/>
                 </a:solidFill>
               </a:rPr>
-              <a:t>命中 62%</a:t>
+              <a:t>hit 62%</a:t>
             </a:r>
           </a:p>
         </p:txBody>
@@ -3211,7 +3211,7 @@
                   <a:srgbClr val="172033"/>
                 </a:solidFill>
               </a:rPr>
-              <a:t>命中 54%</a:t>
+              <a:t>hit 54%</a:t>
             </a:r>
           </a:p>
         </p:txBody>
@@ -3282,14 +3282,14 @@
                   <a:srgbClr val="172033"/>
                 </a:solidFill>
               </a:rPr>
-              <a:t>命中 46%</a:t>
-            </a:r>
-          </a:p>
-        </p:txBody>
-      </p:sp>
-      <p:sp>
-        <p:nvSpPr>
-          <p:cNvPr id="35" name="发现／根因／动作-rail">
+              <a:t>hit 46%</a:t>
+            </a:r>
+          </a:p>
+        </p:txBody>
+      </p:sp>
+      <p:sp>
+        <p:nvSpPr>
+          <p:cNvPr id="35" name="discover／root cause／action-rail">
             <a:extLst xmlns:a="http://schemas.openxmlformats.org/drawingml/2006/main">
               <a:ext uri="{FF2B5EF4-FFF2-40B4-BE49-F238E27FC236}">
                 <a16:creationId xmlns:a16="http://schemas.microsoft.com/office/drawing/2014/main" id="{4F106C5F-51EA-465F-A251-B94E6163CD62}"/>
@@ -3324,7 +3324,7 @@
       </p:sp>
       <p:sp>
         <p:nvSpPr>
-          <p:cNvPr id="36" name="发现／根因／动作-title">
+          <p:cNvPr id="36" name="discover／root cause／action-title">
             <a:extLst xmlns:a="http://schemas.openxmlformats.org/drawingml/2006/main">
               <a:ext uri="{FF2B5EF4-FFF2-40B4-BE49-F238E27FC236}">
                 <a16:creationId xmlns:a16="http://schemas.microsoft.com/office/drawing/2014/main" id="{CCDC9F21-F519-437C-82D9-579F555ACA10}"/>
@@ -3367,14 +3367,14 @@
                   <a:srgbClr val="15375F"/>
                 </a:solidFill>
               </a:rPr>
-              <a:t>发现／根因／动作</a:t>
-            </a:r>
-          </a:p>
-        </p:txBody>
-      </p:sp>
-      <p:sp>
-        <p:nvSpPr>
-          <p:cNvPr id="37" name="发现／根因／动作-1">
+              <a:t>discover／root cause／action</a:t>
+            </a:r>
+          </a:p>
+        </p:txBody>
+      </p:sp>
+      <p:sp>
+        <p:nvSpPr>
+          <p:cNvPr id="37" name="discover／root cause／action-1">
             <a:extLst xmlns:a="http://schemas.openxmlformats.org/drawingml/2006/main">
               <a:ext uri="{FF2B5EF4-FFF2-40B4-BE49-F238E27FC236}">
                 <a16:creationId xmlns:a16="http://schemas.microsoft.com/office/drawing/2014/main" id="{170DD9B4-3114-4213-B512-5F5301AE989B}"/>
@@ -3423,14 +3423,14 @@
                   <a:srgbClr val="172033"/>
                 </a:solidFill>
               </a:rPr>
-              <a:t>1  证明与异动的一次命中率最低</a:t>
-            </a:r>
-          </a:p>
-        </p:txBody>
-      </p:sp>
-      <p:sp>
-        <p:nvSpPr>
-          <p:cNvPr id="38" name="发现／根因／动作-2">
+              <a:t>1  Proof and abnormality have the lowest one-hit rate</a:t>
+            </a:r>
+          </a:p>
+        </p:txBody>
+      </p:sp>
+      <p:sp>
+        <p:nvSpPr>
+          <p:cNvPr id="38" name="discover／root cause／action-2">
             <a:extLst xmlns:a="http://schemas.openxmlformats.org/drawingml/2006/main">
               <a:ext uri="{FF2B5EF4-FFF2-40B4-BE49-F238E27FC236}">
                 <a16:creationId xmlns:a16="http://schemas.microsoft.com/office/drawing/2014/main" id="{C17D08FD-4CFA-4B57-8259-2CD64F096292}"/>
@@ -3479,14 +3479,14 @@
                   <a:srgbClr val="172033"/>
                 </a:solidFill>
               </a:rPr>
-              <a:t>2  目录命名不一致造成二次澄清</a:t>
-            </a:r>
-          </a:p>
-        </p:txBody>
-      </p:sp>
-      <p:sp>
-        <p:nvSpPr>
-          <p:cNvPr id="39" name="发现／根因／动作-3">
+              <a:t>2  Inconsistent directory naming causes secondary clarification</a:t>
+            </a:r>
+          </a:p>
+        </p:txBody>
+      </p:sp>
+      <p:sp>
+        <p:nvSpPr>
+          <p:cNvPr id="39" name="discover／root cause／action-3">
             <a:extLst xmlns:a="http://schemas.openxmlformats.org/drawingml/2006/main">
               <a:ext uri="{FF2B5EF4-FFF2-40B4-BE49-F238E27FC236}">
                 <a16:creationId xmlns:a16="http://schemas.microsoft.com/office/drawing/2014/main" id="{164FAA0D-7C08-4ABF-BDA6-4488738A1DEB}"/>
@@ -3535,7 +3535,7 @@
                   <a:srgbClr val="172033"/>
                 </a:solidFill>
               </a:rPr>
-              <a:t>3  合并证明入口并优化推荐顺序</a:t>
+              <a:t>3  Merge the proof entrance and optimize the recommendation order</a:t>
             </a:r>
           </a:p>
         </p:txBody>
@@ -3591,7 +3591,7 @@
                   <a:srgbClr val="15375F"/>
                 </a:solidFill>
               </a:rPr>
-              <a:t>每万次入口减少 480 次转人工，目标一次命中率达到 85%</a:t>
+              <a:t>Reduction per 10,000 entries 480 After one manual transfer, the target hit rate reaches 85%</a:t>
             </a:r>
           </a:p>
         </p:txBody>
